--- a/presentation/OrgArchive-postman-chain.pptx
+++ b/presentation/OrgArchive-postman-chain.pptx
@@ -449,7 +449,12 @@
         <p:txBody>
           <a:bodyPr xmlns:a="http://schemas.openxmlformats.org/drawingml/2006/main"/>
           <a:lstStyle xmlns:a="http://schemas.openxmlformats.org/drawingml/2006/main"/>
-          <a:p xmlns:a="http://schemas.openxmlformats.org/drawingml/2006/main"/>
+          <a:p xmlns:a="http://schemas.openxmlformats.org/drawingml/2006/main">
+            <a:r>
+              <a:rPr lang="de-DE"/>
+              <a:t>OrgArchive ist ein fiktiver Dienst für Notizen und Dokumente mehrerer Organisationen. Zuerst erkläre ich Architektur und zwei konkrete CVEs; danach führe ich die 16 Anfragen in Postman aus.</a:t>
+            </a:r>
+          </a:p>
         </p:txBody>
       </p:sp>
       <p:sp>
@@ -515,7 +520,12 @@
         <p:txBody>
           <a:bodyPr xmlns:a="http://schemas.openxmlformats.org/drawingml/2006/main"/>
           <a:lstStyle xmlns:a="http://schemas.openxmlformats.org/drawingml/2006/main"/>
-          <a:p xmlns:a="http://schemas.openxmlformats.org/drawingml/2006/main"/>
+          <a:p xmlns:a="http://schemas.openxmlformats.org/drawingml/2006/main">
+            <a:r>
+              <a:rPr lang="de-DE"/>
+              <a:t>Anfragen 1–6: Index, anonyme 401-Antworten, Registrierung und Notizengrenze. 7–12: Rollen-Bypass, Debug-Hash, lokale Passwortsuche und geteilte Notizen. 13–16: normale Suche, fremde Organisation, SQL-Injektion und sichere Vergleichsabfrage. Nach diesem Slide direkt in Postman wechseln.</a:t>
+            </a:r>
+          </a:p>
         </p:txBody>
       </p:sp>
       <p:sp>
@@ -581,7 +591,12 @@
         <p:txBody>
           <a:bodyPr xmlns:a="http://schemas.openxmlformats.org/drawingml/2006/main"/>
           <a:lstStyle xmlns:a="http://schemas.openxmlformats.org/drawingml/2006/main"/>
-          <a:p xmlns:a="http://schemas.openxmlformats.org/drawingml/2006/main"/>
+          <a:p xmlns:a="http://schemas.openxmlformats.org/drawingml/2006/main">
+            <a:r>
+              <a:rPr lang="de-DE"/>
+              <a:t>Von außen ist nur das Gateway auf Port 8080 erreichbar. Es leitet API-Anfragen an den internen Archive Service weiter. Dieser authentifiziert mit HTTP Basic gegen BCrypt-Hashes in MariaDB. Dort liegen auch Notizen und Dokumente.</a:t>
+            </a:r>
+          </a:p>
         </p:txBody>
       </p:sp>
       <p:sp>
@@ -647,7 +662,12 @@
         <p:txBody>
           <a:bodyPr xmlns:a="http://schemas.openxmlformats.org/drawingml/2006/main"/>
           <a:lstStyle xmlns:a="http://schemas.openxmlformats.org/drawingml/2006/main"/>
-          <a:p xmlns:a="http://schemas.openxmlformats.org/drawingml/2006/main"/>
+          <a:p xmlns:a="http://schemas.openxmlformats.org/drawingml/2006/main">
+            <a:r>
+              <a:rPr lang="de-DE"/>
+              <a:t>`GET /` zeigt für die Vorführung eine öffentliche API-Übersicht; `POST /signup` ist ebenfalls öffentlich. Die übrigen Endpunkte verlangen eine Anmeldung. Für `/users` und `/organizations` ist zusätzlich eine Admin-Rolle vorgesehen. Die Angaben `access` im Gateway sind nur Text, keine Sicherheitsregeln. Ohne diesen Index könnte man Routen etwa in API-Dokumentation, Client-Code, beobachtetem Netzwerkverkehr oder durch gezielte Anfragen finden. Eine vollständige Liste folgt daraus nicht automatisch. Das Wissen um einen Pfad darf keinen Zugriff gewähren.</a:t>
+            </a:r>
+          </a:p>
         </p:txBody>
       </p:sp>
       <p:sp>
@@ -713,7 +733,12 @@
         <p:txBody>
           <a:bodyPr xmlns:a="http://schemas.openxmlformats.org/drawingml/2006/main"/>
           <a:lstStyle xmlns:a="http://schemas.openxmlformats.org/drawingml/2006/main"/>
-          <a:p xmlns:a="http://schemas.openxmlformats.org/drawingml/2006/main"/>
+          <a:p xmlns:a="http://schemas.openxmlformats.org/drawingml/2006/main">
+            <a:r>
+              <a:rPr lang="de-DE"/>
+              <a:t>`@EnableMethodSecurity` ist aktiv. `AdminQuery&lt;F,R&gt;.list` trägt `@PreAuthorize("hasRole('ADMIN')")`; die konkreten Controller überschreiben die Methode ohne eigene Annotation. Spring Security 6.4.3 erkennt diese geerbte Regel auf dem generischen Interface nicht zuverlässig. Der HTTP-Filter verlangt weiterhin Authentifizierung. Ein frisch registrierter `ROLE_USER` kann so die Benutzerliste lesen, erhält aber keine Admin-Rolle. Spring Security 6.4.4 behebt den Fehler. Quelle: https://spring.io/security/cve-2025-22223/</a:t>
+            </a:r>
+          </a:p>
         </p:txBody>
       </p:sp>
       <p:sp>
@@ -779,7 +804,12 @@
         <p:txBody>
           <a:bodyPr xmlns:a="http://schemas.openxmlformats.org/drawingml/2006/main"/>
           <a:lstStyle xmlns:a="http://schemas.openxmlformats.org/drawingml/2006/main"/>
-          <a:p xmlns:a="http://schemas.openxmlformats.org/drawingml/2006/main"/>
+          <a:p xmlns:a="http://schemas.openxmlformats.org/drawingml/2006/main">
+            <a:r>
+              <a:rPr lang="de-DE"/>
+              <a:t>Die normale Benutzerliste enthält keine Passwort-Hashes. Mit `debug=true` liefert sie BCrypt-Hashes, was ein Fehler der Anwendung ist. Bobs schwaches Laborpasswort wird anhand seines Hashes offline gefunden; das ist kein Bruch von BCrypt. Die direkte Route `/users/bob` besitzt ihre eigene Admin-Annotation und antwortet für den Besucher mit 403.</a:t>
+            </a:r>
+          </a:p>
         </p:txBody>
       </p:sp>
       <p:sp>
@@ -845,7 +875,12 @@
         <p:txBody>
           <a:bodyPr xmlns:a="http://schemas.openxmlformats.org/drawingml/2006/main"/>
           <a:lstStyle xmlns:a="http://schemas.openxmlformats.org/drawingml/2006/main"/>
-          <a:p xmlns:a="http://schemas.openxmlformats.org/drawingml/2006/main"/>
+          <a:p xmlns:a="http://schemas.openxmlformats.org/drawingml/2006/main">
+            <a:r>
+              <a:rPr lang="de-DE"/>
+              <a:t>Die Registrierung erzeugt ein normales Konto in einer neuen Organisation. Eigene Notizen sind abrufbar, fremde Notizen liefern 403. Bob und Maija gehören zu `atlas-consulting` und teilen Notizen; Renaud gehört zu `harbor-delivery`. Eine gewöhnliche Dokumentsuche nach einer fremden Organisation liefert eine leere Liste.</a:t>
+            </a:r>
+          </a:p>
         </p:txBody>
       </p:sp>
       <p:sp>
@@ -911,7 +946,12 @@
         <p:txBody>
           <a:bodyPr xmlns:a="http://schemas.openxmlformats.org/drawingml/2006/main"/>
           <a:lstStyle xmlns:a="http://schemas.openxmlformats.org/drawingml/2006/main"/>
-          <a:p xmlns:a="http://schemas.openxmlformats.org/drawingml/2006/main"/>
+          <a:p xmlns:a="http://schemas.openxmlformats.org/drawingml/2006/main">
+            <a:r>
+              <a:rPr lang="de-DE"/>
+              <a:t>Der Archive Service liest Bobs Organisation aus dem gespeicherten Benutzerkonto und bindet sie als JDBC-Parameter. Daneben erzeugt Spring AIs `MariaDBFilterExpressionConverter` einen SQL-Ausdruck aus dem vom Client gelieferten Metadatenfilter. Die Anwendung hängt diesen Ausdruck als SQL-Text hinter `AND` an. Der Request-Parameter `query` wird in dieser Demo nicht benutzt; relevant ist `organization`.</a:t>
+            </a:r>
+          </a:p>
         </p:txBody>
       </p:sp>
       <p:sp>
@@ -977,7 +1017,12 @@
         <p:txBody>
           <a:bodyPr xmlns:a="http://schemas.openxmlformats.org/drawingml/2006/main"/>
           <a:lstStyle xmlns:a="http://schemas.openxmlformats.org/drawingml/2006/main"/>
-          <a:p xmlns:a="http://schemas.openxmlformats.org/drawingml/2006/main"/>
+          <a:p xmlns:a="http://schemas.openxmlformats.org/drawingml/2006/main">
+            <a:r>
+              <a:rPr lang="de-DE"/>
+              <a:t>In Spring AI MariaDB Store 1.0.3 wird der Filterwert ohne korrektes Escaping in den SQL-Ausdruck eingesetzt. Der Wert `atlas-consulting' OR '1'='1` verändert dadurch die Bedingung. Da SQL `AND` vor `OR` auswertet, kann der neue `OR`-Teil die Organisationsgrenze umgehen. Die Antwort enthält Dokumente anderer Organisationen. Version 1.0.4 behebt den Fehler. Quelle: https://spring.io/security/cve-2026-22730/</a:t>
+            </a:r>
+          </a:p>
         </p:txBody>
       </p:sp>
       <p:sp>
@@ -1043,7 +1088,12 @@
         <p:txBody>
           <a:bodyPr xmlns:a="http://schemas.openxmlformats.org/drawingml/2006/main"/>
           <a:lstStyle xmlns:a="http://schemas.openxmlformats.org/drawingml/2006/main"/>
-          <a:p xmlns:a="http://schemas.openxmlformats.org/drawingml/2006/main"/>
+          <a:p xmlns:a="http://schemas.openxmlformats.org/drawingml/2006/main">
+            <a:r>
+              <a:rPr lang="de-DE"/>
+              <a:t>`/documents/search-safe` bindet beide Werte als JDBC-Parameter und liefert für denselben manipulierten Wert eine leere Liste. Das ist ein eigener Vergleichsendpunkt, kein gepatchter Spring-AI-Code. Zusätzlich gehören die Bibliotheken aktualisiert, die Rollenprüfung direkt an die konkrete Methode und Passwort-Hashes nicht in API-Antworten.</a:t>
+            </a:r>
+          </a:p>
         </p:txBody>
       </p:sp>
       <p:sp>
@@ -4393,7 +4443,7 @@
                   <a:srgbClr val="5EC6BA"/>
                 </a:solidFill>
               </a:rPr>
-              <a:t>From signup to cross-organization documents</a:t>
+              <a:t>Two CVEs in an organization archive</a:t>
             </a:r>
           </a:p>
         </p:txBody>
@@ -4514,7 +4564,7 @@
                   <a:srgbClr val="D7E0EC"/>
                 </a:solidFill>
               </a:rPr>
-              <a:t>A live Postman chain</a:t>
+              <a:t>Architecture first, live Postman demo next</a:t>
             </a:r>
           </a:p>
         </p:txBody>
@@ -4906,7 +4956,7 @@
                   <a:srgbClr val="FFFFFF"/>
                 </a:solidFill>
               </a:rPr>
-              <a:t>Live sequence</a:t>
+              <a:t>Postman demonstration</a:t>
             </a:r>
           </a:p>
         </p:txBody>
@@ -5027,7 +5077,7 @@
                   <a:srgbClr val="5EC6BA"/>
                 </a:solidFill>
               </a:rPr>
-              <a:t>Sixteen Postman requests, one local hash comparison</a:t>
+              <a:t>Sixteen requests and one local password check</a:t>
             </a:r>
           </a:p>
         </p:txBody>
@@ -5148,7 +5198,7 @@
                   <a:srgbClr val="D7E0EC"/>
                 </a:solidFill>
               </a:rPr>
-              <a:t>1–6  Discovery, signup and notes isolation</a:t>
+              <a:t>1–6  API index, signup and notes isolation</a:t>
             </a:r>
           </a:p>
         </p:txBody>
@@ -5269,7 +5319,7 @@
                   <a:srgbClr val="D7E0EC"/>
                 </a:solidFill>
               </a:rPr>
-              <a:t>7–12  Role bypass, hash recovery and shared notes</a:t>
+              <a:t>7–12  Role bypass, hash recovery, shared notes</a:t>
             </a:r>
           </a:p>
         </p:txBody>
@@ -5390,7 +5440,7 @@
                   <a:srgbClr val="D7E0EC"/>
                 </a:solidFill>
               </a:rPr>
-              <a:t>13–16  Normal, foreign, injected and safe searches</a:t>
+              <a:t>13–16  Plain, foreign, injected and safe searches</a:t>
             </a:r>
           </a:p>
         </p:txBody>
@@ -5661,7 +5711,7 @@
                   <a:srgbClr val="FFFFFF"/>
                 </a:solidFill>
               </a:rPr>
-              <a:t>The records boundary</a:t>
+              <a:t>Service architecture</a:t>
             </a:r>
           </a:p>
         </p:txBody>
@@ -5782,7 +5832,7 @@
                   <a:srgbClr val="5EC6BA"/>
                 </a:solidFill>
               </a:rPr>
-              <a:t>Only the gateway is reachable from the host</a:t>
+              <a:t>Only the gateway is exposed on port 8080</a:t>
             </a:r>
           </a:p>
         </p:txBody>
@@ -6024,7 +6074,7 @@
                   <a:srgbClr val="D7E0EC"/>
                 </a:solidFill>
               </a:rPr>
-              <a:t>Archive service  →  MariaDB accounts</a:t>
+              <a:t>Archive service  →  MariaDB users and BCrypt hashes</a:t>
             </a:r>
           </a:p>
         </p:txBody>
@@ -6416,7 +6466,7 @@
                   <a:srgbClr val="FFFFFF"/>
                 </a:solidFill>
               </a:rPr>
-              <a:t>The baseline</a:t>
+              <a:t>API surface and access</a:t>
             </a:r>
           </a:p>
         </p:txBody>
@@ -6537,7 +6587,7 @@
                   <a:srgbClr val="5EC6BA"/>
                 </a:solidFill>
               </a:rPr>
-              <a:t>Access rules before the exploit</a:t>
+              <a:t>GET / is a public index for this demonstration</a:t>
             </a:r>
           </a:p>
         </p:txBody>
@@ -6658,7 +6708,7 @@
                   <a:srgbClr val="D7E0EC"/>
                 </a:solidFill>
               </a:rPr>
-              <a:t>Anonymous /users and /notes: 401</a:t>
+              <a:t>GET /, POST /signup: public</a:t>
             </a:r>
           </a:p>
         </p:txBody>
@@ -6779,7 +6829,7 @@
                   <a:srgbClr val="D7E0EC"/>
                 </a:solidFill>
               </a:rPr>
-              <a:t>Signup creates a regular organization account</a:t>
+              <a:t>GET /users, /users/{name}, /organizations: admin intent</a:t>
             </a:r>
           </a:p>
         </p:txBody>
@@ -6900,7 +6950,7 @@
                   <a:srgbClr val="D7E0EC"/>
                 </a:solidFill>
               </a:rPr>
-              <a:t>Foreign organization notes: 403</a:t>
+              <a:t>GET /notes: USER; /organizations/{org}/notes: member</a:t>
             </a:r>
           </a:p>
         </p:txBody>
@@ -7021,7 +7071,7 @@
                   <a:srgbClr val="D7E0EC"/>
                 </a:solidFill>
               </a:rPr>
-              <a:t>Plain foreign document search: []</a:t>
+              <a:t>POST /documents/search[-safe|-debug]: USER</a:t>
             </a:r>
           </a:p>
         </p:txBody>
@@ -7292,7 +7342,7 @@
                   <a:srgbClr val="FFFFFF"/>
                 </a:solidFill>
               </a:rPr>
-              <a:t>Signup before the bypass</a:t>
+              <a:t>CVE-2025-22223</a:t>
             </a:r>
           </a:p>
         </p:txBody>
@@ -7413,7 +7463,7 @@
                   <a:srgbClr val="5EC6BA"/>
                 </a:solidFill>
               </a:rPr>
-              <a:t>A normal account starts the attack</a:t>
+              <a:t>Spring Security 6.4.3 misses an inherited role rule</a:t>
             </a:r>
           </a:p>
         </p:txBody>
@@ -7534,7 +7584,7 @@
                   <a:srgbClr val="D7E0EC"/>
                 </a:solidFill>
               </a:rPr>
-              <a:t>POST /signup creates a trial workspace</a:t>
+              <a:t>@EnableMethodSecurity is enabled</a:t>
             </a:r>
           </a:p>
         </p:txBody>
@@ -7655,7 +7705,7 @@
                   <a:srgbClr val="D7E0EC"/>
                 </a:solidFill>
               </a:rPr>
-              <a:t>HTTP Basic authenticates the new user</a:t>
+              <a:t>AdminQuery&lt;F,R&gt;.list has @PreAuthorize("hasRole('ADMIN')")</a:t>
             </a:r>
           </a:p>
         </p:txBody>
@@ -7776,7 +7826,7 @@
                   <a:srgbClr val="D7E0EC"/>
                 </a:solidFill>
               </a:rPr>
-              <a:t>GET /users still requires authentication</a:t>
+              <a:t>Controller overrides list without its own annotation</a:t>
             </a:r>
           </a:p>
         </p:txBody>
@@ -7897,7 +7947,7 @@
                   <a:srgbClr val="D7E0EC"/>
                 </a:solidFill>
               </a:rPr>
-              <a:t>Inherited admin rule is the next boundary</a:t>
+              <a:t>HTTP login remains; regular USER reaches /users</a:t>
             </a:r>
           </a:p>
         </p:txBody>
@@ -8168,7 +8218,7 @@
                   <a:srgbClr val="FFFFFF"/>
                 </a:solidFill>
               </a:rPr>
-              <a:t>Admin debug roster leaks hashes</a:t>
+              <a:t>Hash exposure and account pivot</a:t>
             </a:r>
           </a:p>
         </p:txBody>
@@ -8289,7 +8339,7 @@
                   <a:srgbClr val="5EC6BA"/>
                 </a:solidFill>
               </a:rPr>
-              <a:t>CVE-2025-22223 misses the inherited role rule</a:t>
+              <a:t>Application mistakes amplify the role bypass</a:t>
             </a:r>
           </a:p>
         </p:txBody>
@@ -8410,7 +8460,7 @@
                   <a:srgbClr val="D7E0EC"/>
                 </a:solidFill>
               </a:rPr>
-              <a:t>GET /users?debug=true returns bob.passwordHash</a:t>
+              <a:t>GET /users?debug=true includes BCrypt hashes</a:t>
             </a:r>
           </a:p>
         </p:txBody>
@@ -8531,7 +8581,7 @@
                   <a:srgbClr val="D7E0EC"/>
                 </a:solidFill>
               </a:rPr>
-              <a:t>Compare the hash with solve/wordlist.txt locally</a:t>
+              <a:t>Bob has a weak lab password, found offline</a:t>
             </a:r>
           </a:p>
         </p:txBody>
@@ -8652,7 +8702,7 @@
                   <a:srgbClr val="D7E0EC"/>
                 </a:solidFill>
               </a:rPr>
-              <a:t>Direct /users/bob still denies the regular account</a:t>
+              <a:t>Visitor stays USER; GET /users/bob returns 403</a:t>
             </a:r>
           </a:p>
         </p:txBody>
@@ -8773,7 +8823,7 @@
                   <a:srgbClr val="D7E0EC"/>
                 </a:solidFill>
               </a:rPr>
-              <a:t>Set the recovered word in a local Postman variable</a:t>
+              <a:t>Bob’s login opens his organization’s records</a:t>
             </a:r>
           </a:p>
         </p:txBody>
@@ -9044,7 +9094,7 @@
                   <a:srgbClr val="FFFFFF"/>
                 </a:solidFill>
               </a:rPr>
-              <a:t>Notes belong to an organization</a:t>
+              <a:t>Organization boundaries</a:t>
             </a:r>
           </a:p>
         </p:txBody>
@@ -9165,7 +9215,7 @@
                   <a:srgbClr val="5EC6BA"/>
                 </a:solidFill>
               </a:rPr>
-              <a:t>Bob and Maija share atlas-consulting notes</a:t>
+              <a:t>Notes and documents use the signed-in account</a:t>
             </a:r>
           </a:p>
         </p:txBody>
@@ -9286,7 +9336,7 @@
                   <a:srgbClr val="D7E0EC"/>
                 </a:solidFill>
               </a:rPr>
-              <a:t>GET /notes uses the signed-in account</a:t>
+              <a:t>Trial user: own notes 200, foreign notes 403</a:t>
             </a:r>
           </a:p>
         </p:txBody>
@@ -9407,7 +9457,7 @@
                   <a:srgbClr val="D7E0EC"/>
                 </a:solidFill>
               </a:rPr>
-              <a:t>The archive reads organization from the database user</a:t>
+              <a:t>Bob and Maija share atlas-consulting notes</a:t>
             </a:r>
           </a:p>
         </p:txBody>
@@ -9528,7 +9578,7 @@
                   <a:srgbClr val="D7E0EC"/>
                 </a:solidFill>
               </a:rPr>
-              <a:t>Bob and Maija receive the same records</a:t>
+              <a:t>Renaud sees separate harbor-delivery notes</a:t>
             </a:r>
           </a:p>
         </p:txBody>
@@ -9649,7 +9699,7 @@
                   <a:srgbClr val="D7E0EC"/>
                 </a:solidFill>
               </a:rPr>
-              <a:t>Renaud receives separate harbor-delivery notes</a:t>
+              <a:t>Plain foreign document search returns []</a:t>
             </a:r>
           </a:p>
         </p:txBody>
@@ -9920,7 +9970,7 @@
                   <a:srgbClr val="FFFFFF"/>
                 </a:solidFill>
               </a:rPr>
-              <a:t>The ordinary search stays scoped</a:t>
+              <a:t>Search query construction</a:t>
             </a:r>
           </a:p>
         </p:txBody>
@@ -10041,7 +10091,7 @@
                   <a:srgbClr val="5EC6BA"/>
                 </a:solidFill>
               </a:rPr>
-              <a:t>Bob cannot request another organization by name</a:t>
+              <a:t>Server scope plus a generated metadata expression</a:t>
             </a:r>
           </a:p>
         </p:txBody>
@@ -10162,7 +10212,7 @@
                   <a:srgbClr val="D7E0EC"/>
                 </a:solidFill>
               </a:rPr>
-              <a:t>WHERE JSON_VALUE(metadata, '$.organization') = ?</a:t>
+              <a:t>Bob’s stored organization is bound as a JDBC value</a:t>
             </a:r>
           </a:p>
         </p:txBody>
@@ -10283,7 +10333,7 @@
                   <a:srgbClr val="D7E0EC"/>
                 </a:solidFill>
               </a:rPr>
-              <a:t>AND &lt;converter output for requested organization&gt;</a:t>
+              <a:t>Request.organization enters Spring AI’s converter</a:t>
             </a:r>
           </a:p>
         </p:txBody>
@@ -10404,7 +10454,7 @@
                   <a:srgbClr val="D7E0EC"/>
                 </a:solidFill>
               </a:rPr>
-              <a:t>The first value comes from Bob’s database profile</a:t>
+              <a:t>SQL combines scope = ? AND &lt;converter output&gt;</a:t>
             </a:r>
           </a:p>
         </p:txBody>
@@ -10525,7 +10575,7 @@
                   <a:srgbClr val="D7E0EC"/>
                 </a:solidFill>
               </a:rPr>
-              <a:t>The plain harbor-delivery filter returns []</a:t>
+              <a:t>A plain foreign organization filter returns no rows</a:t>
             </a:r>
           </a:p>
         </p:txBody>
@@ -10796,7 +10846,7 @@
                   <a:srgbClr val="FFFFFF"/>
                 </a:solidFill>
               </a:rPr>
-              <a:t>A quote changes the SQL predicate</a:t>
+              <a:t>CVE-2026-22730</a:t>
             </a:r>
           </a:p>
         </p:txBody>
@@ -10917,7 +10967,7 @@
                   <a:srgbClr val="5EC6BA"/>
                 </a:solidFill>
               </a:rPr>
-              <a:t>CVE-2026-22730 in Spring AI 1.0.3</a:t>
+              <a:t>Spring AI 1.0.3 emits an unescaped filter value</a:t>
             </a:r>
           </a:p>
         </p:txBody>
@@ -11038,7 +11088,7 @@
                   <a:srgbClr val="D7E0EC"/>
                 </a:solidFill>
               </a:rPr>
-              <a:t>Requested organization: atlas-consulting' OR '1'='1</a:t>
+              <a:t>Input: atlas-consulting' OR '1'='1</a:t>
             </a:r>
           </a:p>
         </p:txBody>
@@ -11159,7 +11209,7 @@
                   <a:srgbClr val="D7E0EC"/>
                 </a:solidFill>
               </a:rPr>
-              <a:t>The converter emits the quote without escaping it</a:t>
+              <a:t>The quote enters SQL through the converter</a:t>
             </a:r>
           </a:p>
         </p:txBody>
@@ -11280,7 +11330,7 @@
                   <a:srgbClr val="D7E0EC"/>
                 </a:solidFill>
               </a:rPr>
-              <a:t>SQL evaluates the scoped AND before the injected OR</a:t>
+              <a:t>Scope = ? AND filter OR true; AND runs first</a:t>
             </a:r>
           </a:p>
         </p:txBody>
@@ -11401,7 +11451,7 @@
                   <a:srgbClr val="D7E0EC"/>
                 </a:solidFill>
               </a:rPr>
-              <a:t>The response includes meridian-legal records</a:t>
+              <a:t>Documents from other organizations appear</a:t>
             </a:r>
           </a:p>
         </p:txBody>
@@ -11672,7 +11722,7 @@
                   <a:srgbClr val="FFFFFF"/>
                 </a:solidFill>
               </a:rPr>
-              <a:t>The same input stays data when bound</a:t>
+              <a:t>Safe comparison and fixes</a:t>
             </a:r>
           </a:p>
         </p:txBody>
@@ -11793,7 +11843,7 @@
                   <a:srgbClr val="5EC6BA"/>
                 </a:solidFill>
               </a:rPr>
-              <a:t>The application-level safe query preserves isolation</a:t>
+              <a:t>Bind values, update libraries, remove hash exposure</a:t>
             </a:r>
           </a:p>
         </p:txBody>
@@ -11914,7 +11964,7 @@
                   <a:srgbClr val="D7E0EC"/>
                 </a:solidFill>
               </a:rPr>
-              <a:t>/documents/search-safe binds both values</a:t>
+              <a:t>/documents/search-safe binds both SQL values</a:t>
             </a:r>
           </a:p>
         </p:txBody>
@@ -12035,7 +12085,7 @@
                   <a:srgbClr val="D7E0EC"/>
                 </a:solidFill>
               </a:rPr>
-              <a:t>The injected string returns []</a:t>
+              <a:t>The injected input returns no rows in that comparison</a:t>
             </a:r>
           </a:p>
         </p:txBody>
@@ -12156,7 +12206,7 @@
                   <a:srgbClr val="D7E0EC"/>
                 </a:solidFill>
               </a:rPr>
-              <a:t>This endpoint demonstrates parameter binding</a:t>
+              <a:t>Fix: Security 6.4.4; Spring AI 1.0.4</a:t>
             </a:r>
           </a:p>
         </p:txBody>
@@ -12277,7 +12327,7 @@
                   <a:srgbClr val="D7E0EC"/>
                 </a:solidFill>
               </a:rPr>
-              <a:t>It does not represent a patched Spring AI build</a:t>
+              <a:t>Put admin rule on method; omit debug hashes</a:t>
             </a:r>
           </a:p>
         </p:txBody>
